--- a/SIH_AVIAN_FINAL/deck/SIH26201_AVIAN_Idea.pptx
+++ b/SIH_AVIAN_FINAL/deck/SIH26201_AVIAN_Idea.pptx
@@ -5770,7 +5770,7 @@
                 </a:solidFill>
                 <a:latin typeface="Arial"/>
               </a:rPr>
-              <a:t> [Team ID]</a:t>
+              <a:t> 129300</a:t>
             </a:r>
           </a:p>
           <a:p>
@@ -5795,7 +5795,7 @@
                 </a:solidFill>
                 <a:latin typeface="Arial"/>
               </a:rPr>
-              <a:t> - [Team Name]</a:t>
+              <a:t> - @TRINETRA</a:t>
             </a:r>
             <a:endParaRPr lang="en-IN" sz="2400" b="1" dirty="0">
               <a:latin typeface="Arial" panose="020B0604020202020204" pitchFamily="34" charset="0"/>
@@ -6074,13 +6074,13 @@
           </a:fontRef>
         </p:style>
         <p:txBody>
-          <a:bodyPr rtlCol="0" anchor="ctr"/>
+          <a:bodyPr rtlCol="0" anchor="ctr" wrap="none"/>
           <a:lstStyle/>
           <a:p>
             <a:pPr algn="ctr"/>
             <a:r>
-              <a:rPr lang="en-US" dirty="0"/>
-              <a:t>[Team Name]</a:t>
+              <a:rPr lang="en-US" dirty="0" sz="1100" b="1"/>
+              <a:t>TRINETRA</a:t>
             </a:r>
             <a:endParaRPr lang="en-IN" dirty="0"/>
           </a:p>
@@ -6829,13 +6829,13 @@
           </a:fontRef>
         </p:style>
         <p:txBody>
-          <a:bodyPr rtlCol="0" anchor="ctr"/>
+          <a:bodyPr rtlCol="0" anchor="ctr" wrap="none"/>
           <a:lstStyle/>
           <a:p>
             <a:pPr algn="ctr"/>
             <a:r>
-              <a:rPr lang="en-US" dirty="0"/>
-              <a:t>[Team Name]</a:t>
+              <a:rPr lang="en-US" dirty="0" sz="1100" b="1"/>
+              <a:t>TRINETRA</a:t>
             </a:r>
             <a:endParaRPr lang="en-IN" dirty="0"/>
           </a:p>
@@ -9153,13 +9153,13 @@
           </a:fontRef>
         </p:style>
         <p:txBody>
-          <a:bodyPr rtlCol="0" anchor="ctr"/>
+          <a:bodyPr rtlCol="0" anchor="ctr" wrap="none"/>
           <a:lstStyle/>
           <a:p>
             <a:pPr algn="ctr"/>
             <a:r>
-              <a:rPr lang="en-US" dirty="0"/>
-              <a:t>[Team Name]</a:t>
+              <a:rPr lang="en-US" dirty="0" sz="1100" b="1"/>
+              <a:t>TRINETRA</a:t>
             </a:r>
             <a:endParaRPr lang="en-IN" dirty="0"/>
           </a:p>
@@ -10250,13 +10250,13 @@
           </a:fontRef>
         </p:style>
         <p:txBody>
-          <a:bodyPr rtlCol="0" anchor="ctr"/>
+          <a:bodyPr rtlCol="0" anchor="ctr" wrap="none"/>
           <a:lstStyle/>
           <a:p>
             <a:pPr algn="ctr"/>
             <a:r>
-              <a:rPr lang="en-US" dirty="0"/>
-              <a:t>[Team Name]</a:t>
+              <a:rPr lang="en-US" dirty="0" sz="1100" b="1"/>
+              <a:t>TRINETRA</a:t>
             </a:r>
             <a:endParaRPr lang="en-IN" dirty="0"/>
           </a:p>
@@ -11629,13 +11629,13 @@
           </a:fontRef>
         </p:style>
         <p:txBody>
-          <a:bodyPr rtlCol="0" anchor="ctr"/>
+          <a:bodyPr rtlCol="0" anchor="ctr" wrap="none"/>
           <a:lstStyle/>
           <a:p>
             <a:pPr algn="ctr"/>
             <a:r>
-              <a:rPr lang="en-US" dirty="0"/>
-              <a:t>[Team Name]</a:t>
+              <a:rPr lang="en-US" dirty="0" sz="1100" b="1"/>
+              <a:t>TRINETRA</a:t>
             </a:r>
             <a:endParaRPr lang="en-IN" dirty="0"/>
           </a:p>

--- a/SIH_AVIAN_FINAL/deck/SIH26201_AVIAN_Idea.pptx
+++ b/SIH_AVIAN_FINAL/deck/SIH26201_AVIAN_Idea.pptx
@@ -6080,7 +6080,7 @@
             <a:pPr algn="ctr"/>
             <a:r>
               <a:rPr lang="en-US" dirty="0" sz="1100" b="1"/>
-              <a:t>TRINETRA</a:t>
+              <a:t>@TRINETRA</a:t>
             </a:r>
             <a:endParaRPr lang="en-IN" dirty="0"/>
           </a:p>
@@ -6835,7 +6835,7 @@
             <a:pPr algn="ctr"/>
             <a:r>
               <a:rPr lang="en-US" dirty="0" sz="1100" b="1"/>
-              <a:t>TRINETRA</a:t>
+              <a:t>@TRINETRA</a:t>
             </a:r>
             <a:endParaRPr lang="en-IN" dirty="0"/>
           </a:p>
@@ -8292,7 +8292,7 @@
                 </a:solidFill>
                 <a:latin typeface="Arial"/>
               </a:rPr>
-              <a:t>~9° zoom view from 8 m, at the pose actually reached</a:t>
+              <a:t>8.7× zoom (9° HFOV) from 8 m, at the achieved pose</a:t>
             </a:r>
           </a:p>
         </p:txBody>
@@ -9159,7 +9159,7 @@
             <a:pPr algn="ctr"/>
             <a:r>
               <a:rPr lang="en-US" dirty="0" sz="1100" b="1"/>
-              <a:t>TRINETRA</a:t>
+              <a:t>@TRINETRA</a:t>
             </a:r>
             <a:endParaRPr lang="en-IN" dirty="0"/>
           </a:p>
@@ -9291,11 +9291,11 @@
             <a:r>
               <a:rPr sz="2000" b="1" i="0">
                 <a:solidFill>
-                  <a:srgbClr val="0070C0"/>
-                </a:solidFill>
-                <a:latin typeface="Arial"/>
-              </a:rPr>
-              <a:t>56.7%</a:t>
+                  <a:srgbClr val="596270"/>
+                </a:solidFill>
+                <a:latin typeface="Arial"/>
+              </a:rPr>
+              <a:t>—</a:t>
             </a:r>
           </a:p>
         </p:txBody>
@@ -9326,11 +9326,11 @@
             <a:r>
               <a:rPr sz="1100" b="0" i="0">
                 <a:solidFill>
-                  <a:srgbClr val="1F2A44"/>
-                </a:solidFill>
-                <a:latin typeface="Arial"/>
-              </a:rPr>
-              <a:t>of bridge surfaces seen by the camera — route planned with no defect data (150 waypoints)</a:t>
+                  <a:srgbClr val="596270"/>
+                </a:solidFill>
+                <a:latin typeface="Arial"/>
+              </a:rPr>
+              <a:t>bridge surface coverage — route planned with no defect data (pending freeze)</a:t>
             </a:r>
           </a:p>
         </p:txBody>
@@ -9361,11 +9361,11 @@
             <a:r>
               <a:rPr sz="2000" b="1" i="0">
                 <a:solidFill>
-                  <a:srgbClr val="0070C0"/>
-                </a:solidFill>
-                <a:latin typeface="Arial"/>
-              </a:rPr>
-              <a:t>39 / 73</a:t>
+                  <a:srgbClr val="596270"/>
+                </a:solidFill>
+                <a:latin typeface="Arial"/>
+              </a:rPr>
+              <a:t>—</a:t>
             </a:r>
           </a:p>
         </p:txBody>
@@ -9396,11 +9396,11 @@
             <a:r>
               <a:rPr sz="1100" b="0" i="0">
                 <a:solidFill>
-                  <a:srgbClr val="1F2A44"/>
-                </a:solidFill>
-                <a:latin typeface="Arial"/>
-              </a:rPr>
-              <a:t>known defects fell inside a settled camera view (53.4%)</a:t>
+                  <a:srgbClr val="596270"/>
+                </a:solidFill>
+                <a:latin typeface="Arial"/>
+              </a:rPr>
+              <a:t>known defects fell inside a settled camera view (pending freeze)</a:t>
             </a:r>
           </a:p>
         </p:txBody>
@@ -9431,11 +9431,11 @@
             <a:r>
               <a:rPr sz="2000" b="1" i="0">
                 <a:solidFill>
-                  <a:srgbClr val="0070C0"/>
-                </a:solidFill>
-                <a:latin typeface="Arial"/>
-              </a:rPr>
-              <a:t>239 / 239</a:t>
+                  <a:srgbClr val="596270"/>
+                </a:solidFill>
+                <a:latin typeface="Arial"/>
+              </a:rPr>
+              <a:t>—</a:t>
             </a:r>
           </a:p>
         </p:txBody>
@@ -9466,11 +9466,11 @@
             <a:r>
               <a:rPr sz="1100" b="0" i="0">
                 <a:solidFill>
-                  <a:srgbClr val="1F2A44"/>
-                </a:solidFill>
-                <a:latin typeface="Arial"/>
-              </a:rPr>
-              <a:t>flight-log entries show avoidance driven by the sensor, not a map (6,492 reactions)</a:t>
+                  <a:srgbClr val="596270"/>
+                </a:solidFill>
+                <a:latin typeface="Arial"/>
+              </a:rPr>
+              <a:t>flight-log entries show avoidance driven by the sensor, not a map (pending freeze)</a:t>
             </a:r>
           </a:p>
         </p:txBody>
@@ -9501,11 +9501,11 @@
             <a:r>
               <a:rPr sz="2000" b="1" i="0">
                 <a:solidFill>
-                  <a:srgbClr val="0070C0"/>
-                </a:solidFill>
-                <a:latin typeface="Arial"/>
-              </a:rPr>
-              <a:t>71% → 45%</a:t>
+                  <a:srgbClr val="596270"/>
+                </a:solidFill>
+                <a:latin typeface="Arial"/>
+              </a:rPr>
+              <a:t>—</a:t>
             </a:r>
           </a:p>
         </p:txBody>
@@ -9536,11 +9536,11 @@
             <a:r>
               <a:rPr sz="1100" b="0" i="0">
                 <a:solidFill>
-                  <a:srgbClr val="1F2A44"/>
-                </a:solidFill>
-                <a:latin typeface="Arial"/>
-              </a:rPr>
-              <a:t>waypoints with a collision or stall, before vs after sensed avoidance</a:t>
+                  <a:srgbClr val="596270"/>
+                </a:solidFill>
+                <a:latin typeface="Arial"/>
+              </a:rPr>
+              <a:t>waypoints with a collision or stall, before vs after sensed avoidance (pending freeze)</a:t>
             </a:r>
           </a:p>
         </p:txBody>
@@ -9699,7 +9699,7 @@
                           </a:solidFill>
                           <a:latin typeface="Arial"/>
                         </a:rPr>
-                        <a:t>Detection accuracy is the weakest link: only 1–2 of 10 defects found in zoomed mission images (two model versions); loose bolts are too small at current camera resolution</a:t>
+                        <a:t>Detection accuracy is the weakest link: 0 detections on 1,000 real bridge photos (precision = recall = 0) — doesn't yet transfer from simulation; on its own mission imagery, unseen-defect recall is 1 of 3 in-scope cases (5 of 20 for all defects, optimistic); false alarms fell from 37.6 to 0.08 per 100 tiles (v1 → v2); loose bolts (~10 px) are below reliable detection at current resolution</a:t>
                       </a:r>
                     </a:p>
                   </a:txBody>
@@ -9747,7 +9747,7 @@
                           </a:solidFill>
                           <a:latin typeface="Arial"/>
                         </a:rPr>
-                        <a:t>Collisions in the dense steel truss: 45% of waypoints still hit or stall in simulation</a:t>
+                        <a:t>Collisions in the dense steel truss: stuck/collision rate before → after the Section 4 fix is pending the freeze — see the stat at left</a:t>
                       </a:r>
                     </a:p>
                   </a:txBody>
@@ -10256,7 +10256,7 @@
             <a:pPr algn="ctr"/>
             <a:r>
               <a:rPr lang="en-US" dirty="0" sz="1100" b="1"/>
-              <a:t>TRINETRA</a:t>
+              <a:t>@TRINETRA</a:t>
             </a:r>
             <a:endParaRPr lang="en-IN" dirty="0"/>
           </a:p>
@@ -11635,7 +11635,7 @@
             <a:pPr algn="ctr"/>
             <a:r>
               <a:rPr lang="en-US" dirty="0" sz="1100" b="1"/>
-              <a:t>TRINETRA</a:t>
+              <a:t>@TRINETRA</a:t>
             </a:r>
             <a:endParaRPr lang="en-IN" dirty="0"/>
           </a:p>

--- a/SIH_AVIAN_FINAL/deck/SIH26201_AVIAN_Idea.pptx
+++ b/SIH_AVIAN_FINAL/deck/SIH26201_AVIAN_Idea.pptx
@@ -8815,7 +8815,7 @@
                 </a:solidFill>
                 <a:latin typeface="Arial"/>
               </a:rPr>
-              <a:t>Next: </a:t>
+              <a:t>Gazebo: </a:t>
             </a:r>
             <a:r>
               <a:rPr sz="1250" b="0" i="0">
@@ -8824,7 +8824,7 @@
                 </a:solidFill>
                 <a:latin typeface="Arial"/>
               </a:rPr>
-              <a:t>run the same stack live in Gazebo + ROS 2, then on PX4 hardware.</a:t>
+              <a:t>fully autonomous flight validated (real takeoff/hover/land, sensed obstacle avoidance confirmed collision-free); full-corridor autonomous coverage and live defect detection in Gazebo remain in progress.</a:t>
             </a:r>
           </a:p>
         </p:txBody>
@@ -9291,11 +9291,11 @@
             <a:r>
               <a:rPr sz="2000" b="1" i="0">
                 <a:solidFill>
-                  <a:srgbClr val="596270"/>
-                </a:solidFill>
-                <a:latin typeface="Arial"/>
-              </a:rPr>
-              <a:t>—</a:t>
+                  <a:srgbClr val="0070C0"/>
+                </a:solidFill>
+                <a:latin typeface="Arial"/>
+              </a:rPr>
+              <a:t>56.66%</a:t>
             </a:r>
           </a:p>
         </p:txBody>
@@ -9326,11 +9326,11 @@
             <a:r>
               <a:rPr sz="1100" b="0" i="0">
                 <a:solidFill>
-                  <a:srgbClr val="596270"/>
-                </a:solidFill>
-                <a:latin typeface="Arial"/>
-              </a:rPr>
-              <a:t>bridge surface coverage — route planned with no defect data (pending freeze)</a:t>
+                  <a:srgbClr val="1F2A44"/>
+                </a:solidFill>
+                <a:latin typeface="Arial"/>
+              </a:rPr>
+              <a:t>bridge surface coverage — route planned with no defect data</a:t>
             </a:r>
           </a:p>
         </p:txBody>
@@ -9361,11 +9361,11 @@
             <a:r>
               <a:rPr sz="2000" b="1" i="0">
                 <a:solidFill>
-                  <a:srgbClr val="596270"/>
-                </a:solidFill>
-                <a:latin typeface="Arial"/>
-              </a:rPr>
-              <a:t>—</a:t>
+                  <a:srgbClr val="0070C0"/>
+                </a:solidFill>
+                <a:latin typeface="Arial"/>
+              </a:rPr>
+              <a:t>39/73</a:t>
             </a:r>
           </a:p>
         </p:txBody>
@@ -9396,11 +9396,11 @@
             <a:r>
               <a:rPr sz="1100" b="0" i="0">
                 <a:solidFill>
-                  <a:srgbClr val="596270"/>
-                </a:solidFill>
-                <a:latin typeface="Arial"/>
-              </a:rPr>
-              <a:t>known defects fell inside a settled camera view (pending freeze)</a:t>
+                  <a:srgbClr val="1F2A44"/>
+                </a:solidFill>
+                <a:latin typeface="Arial"/>
+              </a:rPr>
+              <a:t>known defects fell inside a settled camera view (recall)</a:t>
             </a:r>
           </a:p>
         </p:txBody>
@@ -9431,11 +9431,11 @@
             <a:r>
               <a:rPr sz="2000" b="1" i="0">
                 <a:solidFill>
-                  <a:srgbClr val="596270"/>
-                </a:solidFill>
-                <a:latin typeface="Arial"/>
-              </a:rPr>
-              <a:t>—</a:t>
+                  <a:srgbClr val="0070C0"/>
+                </a:solidFill>
+                <a:latin typeface="Arial"/>
+              </a:rPr>
+              <a:t>239/239</a:t>
             </a:r>
           </a:p>
         </p:txBody>
@@ -9466,11 +9466,11 @@
             <a:r>
               <a:rPr sz="1100" b="0" i="0">
                 <a:solidFill>
-                  <a:srgbClr val="596270"/>
-                </a:solidFill>
-                <a:latin typeface="Arial"/>
-              </a:rPr>
-              <a:t>flight-log entries show avoidance driven by the sensor, not a map (pending freeze)</a:t>
+                  <a:srgbClr val="1F2A44"/>
+                </a:solidFill>
+                <a:latin typeface="Arial"/>
+              </a:rPr>
+              <a:t>flight-log entries show avoidance driven by the sensor, not a map (6,492 avoidance reactions triggered)</a:t>
             </a:r>
           </a:p>
         </p:txBody>
@@ -9501,11 +9501,11 @@
             <a:r>
               <a:rPr sz="2000" b="1" i="0">
                 <a:solidFill>
-                  <a:srgbClr val="596270"/>
-                </a:solidFill>
-                <a:latin typeface="Arial"/>
-              </a:rPr>
-              <a:t>—</a:t>
+                  <a:srgbClr val="0070C0"/>
+                </a:solidFill>
+                <a:latin typeface="Arial"/>
+              </a:rPr>
+              <a:t>67/150</a:t>
             </a:r>
           </a:p>
         </p:txBody>
@@ -9536,11 +9536,11 @@
             <a:r>
               <a:rPr sz="1100" b="0" i="0">
                 <a:solidFill>
-                  <a:srgbClr val="596270"/>
-                </a:solidFill>
-                <a:latin typeface="Arial"/>
-              </a:rPr>
-              <a:t>waypoints with a collision or stall, before vs after sensed avoidance (pending freeze)</a:t>
+                  <a:srgbClr val="1F2A44"/>
+                </a:solidFill>
+                <a:latin typeface="Arial"/>
+              </a:rPr>
+              <a:t>waypoints stuck or collided (44.7%) — reported Stage 2 baseline</a:t>
             </a:r>
           </a:p>
         </p:txBody>
@@ -9747,7 +9747,7 @@
                           </a:solidFill>
                           <a:latin typeface="Arial"/>
                         </a:rPr>
-                        <a:t>Collisions in the dense steel truss: stuck/collision rate before → after the Section 4 fix is pending the freeze — see the stat at left</a:t>
+                        <a:t>Collisions in the dense steel truss: 44.7% of waypoints stuck or collided (67/150) — reported Stage 2 baseline, see the stat at left</a:t>
                       </a:r>
                     </a:p>
                   </a:txBody>
